--- a/Notes/S3/claf - pramod sir/CLAF MOD 1.pptx
+++ b/Notes/S3/claf - pramod sir/CLAF MOD 1.pptx
@@ -134,6 +134,22 @@
       </a:defRPr>
     </a:lvl9pPr>
   </p:defaultTextStyle>
+  <p:extLst>
+    <p:ext uri="{EFAFB233-063F-42B5-8137-9DF3F51BA10A}">
+      <p15:sldGuideLst xmlns:p15="http://schemas.microsoft.com/office/powerpoint/2012/main">
+        <p15:guide id="1" orient="horz" pos="2160">
+          <p15:clr>
+            <a:srgbClr val="A4A3A4"/>
+          </p15:clr>
+        </p15:guide>
+        <p15:guide id="2" pos="2880">
+          <p15:clr>
+            <a:srgbClr val="A4A3A4"/>
+          </p15:clr>
+        </p15:guide>
+      </p15:sldGuideLst>
+    </p:ext>
+  </p:extLst>
 </p:presentation>
 </file>
 
@@ -2742,7 +2758,7 @@
           </a:lstStyle>
           <a:p>
             <a:r>
-              <a:rPr lang="en-US" smtClean="0"/>
+              <a:rPr lang="en-US"/>
               <a:t>Click to edit Master title style</a:t>
             </a:r>
             <a:endParaRPr lang="en-US" dirty="0"/>
@@ -2861,7 +2877,7 @@
           </a:lstStyle>
           <a:p>
             <a:r>
-              <a:rPr lang="en-US" smtClean="0"/>
+              <a:rPr lang="en-US"/>
               <a:t>Click to edit Master subtitle style</a:t>
             </a:r>
             <a:endParaRPr lang="en-US" dirty="0"/>
@@ -2894,7 +2910,7 @@
           <a:p>
             <a:fld id="{335D1D77-CA2D-4434-9216-5DA5E134C8E7}" type="datetimeFigureOut">
               <a:rPr lang="en-IN" smtClean="0"/>
-              <a:t>01-07-2025</a:t>
+              <a:t>08-09-2026</a:t>
             </a:fld>
             <a:endParaRPr lang="en-IN"/>
           </a:p>
@@ -3103,10 +3119,9 @@
           <a:lstStyle/>
           <a:p>
             <a:r>
-              <a:rPr lang="en-US" smtClean="0"/>
+              <a:rPr lang="en-US"/>
               <a:t>Click to edit Master title style</a:t>
             </a:r>
-            <a:endParaRPr lang="en-US"/>
           </a:p>
         </p:txBody>
       </p:sp>
@@ -3127,38 +3142,37 @@
           <a:p>
             <a:pPr lvl="0"/>
             <a:r>
-              <a:rPr lang="en-US" smtClean="0"/>
+              <a:rPr lang="en-US"/>
               <a:t>Click to edit Master text styles</a:t>
             </a:r>
           </a:p>
           <a:p>
             <a:pPr lvl="1"/>
             <a:r>
-              <a:rPr lang="en-US" smtClean="0"/>
+              <a:rPr lang="en-US"/>
               <a:t>Second level</a:t>
             </a:r>
           </a:p>
           <a:p>
             <a:pPr lvl="2"/>
             <a:r>
-              <a:rPr lang="en-US" smtClean="0"/>
+              <a:rPr lang="en-US"/>
               <a:t>Third level</a:t>
             </a:r>
           </a:p>
           <a:p>
             <a:pPr lvl="3"/>
             <a:r>
-              <a:rPr lang="en-US" smtClean="0"/>
+              <a:rPr lang="en-US"/>
               <a:t>Fourth level</a:t>
             </a:r>
           </a:p>
           <a:p>
             <a:pPr lvl="4"/>
             <a:r>
-              <a:rPr lang="en-US" smtClean="0"/>
+              <a:rPr lang="en-US"/>
               <a:t>Fifth level</a:t>
             </a:r>
-            <a:endParaRPr lang="en-US"/>
           </a:p>
         </p:txBody>
       </p:sp>
@@ -3179,7 +3193,7 @@
           <a:p>
             <a:fld id="{335D1D77-CA2D-4434-9216-5DA5E134C8E7}" type="datetimeFigureOut">
               <a:rPr lang="en-IN" smtClean="0"/>
-              <a:t>01-07-2025</a:t>
+              <a:t>08-09-2026</a:t>
             </a:fld>
             <a:endParaRPr lang="en-IN"/>
           </a:p>
@@ -3273,10 +3287,9 @@
           <a:lstStyle/>
           <a:p>
             <a:r>
-              <a:rPr lang="en-US" smtClean="0"/>
+              <a:rPr lang="en-US"/>
               <a:t>Click to edit Master title style</a:t>
             </a:r>
-            <a:endParaRPr lang="en-US"/>
           </a:p>
         </p:txBody>
       </p:sp>
@@ -3302,38 +3315,37 @@
           <a:p>
             <a:pPr lvl="0"/>
             <a:r>
-              <a:rPr lang="en-US" smtClean="0"/>
+              <a:rPr lang="en-US"/>
               <a:t>Click to edit Master text styles</a:t>
             </a:r>
           </a:p>
           <a:p>
             <a:pPr lvl="1"/>
             <a:r>
-              <a:rPr lang="en-US" smtClean="0"/>
+              <a:rPr lang="en-US"/>
               <a:t>Second level</a:t>
             </a:r>
           </a:p>
           <a:p>
             <a:pPr lvl="2"/>
             <a:r>
-              <a:rPr lang="en-US" smtClean="0"/>
+              <a:rPr lang="en-US"/>
               <a:t>Third level</a:t>
             </a:r>
           </a:p>
           <a:p>
             <a:pPr lvl="3"/>
             <a:r>
-              <a:rPr lang="en-US" smtClean="0"/>
+              <a:rPr lang="en-US"/>
               <a:t>Fourth level</a:t>
             </a:r>
           </a:p>
           <a:p>
             <a:pPr lvl="4"/>
             <a:r>
-              <a:rPr lang="en-US" smtClean="0"/>
+              <a:rPr lang="en-US"/>
               <a:t>Fifth level</a:t>
             </a:r>
-            <a:endParaRPr lang="en-US"/>
           </a:p>
         </p:txBody>
       </p:sp>
@@ -3354,7 +3366,7 @@
           <a:p>
             <a:fld id="{335D1D77-CA2D-4434-9216-5DA5E134C8E7}" type="datetimeFigureOut">
               <a:rPr lang="en-IN" smtClean="0"/>
-              <a:t>01-07-2025</a:t>
+              <a:t>08-09-2026</a:t>
             </a:fld>
             <a:endParaRPr lang="en-IN"/>
           </a:p>
@@ -3443,10 +3455,9 @@
           <a:lstStyle/>
           <a:p>
             <a:r>
-              <a:rPr lang="en-US" smtClean="0"/>
+              <a:rPr lang="en-US"/>
               <a:t>Click to edit Master title style</a:t>
             </a:r>
-            <a:endParaRPr lang="en-US"/>
           </a:p>
         </p:txBody>
       </p:sp>
@@ -3467,35 +3478,35 @@
           <a:p>
             <a:pPr lvl="0"/>
             <a:r>
-              <a:rPr lang="en-US" smtClean="0"/>
+              <a:rPr lang="en-US"/>
               <a:t>Click to edit Master text styles</a:t>
             </a:r>
           </a:p>
           <a:p>
             <a:pPr lvl="1"/>
             <a:r>
-              <a:rPr lang="en-US" smtClean="0"/>
+              <a:rPr lang="en-US"/>
               <a:t>Second level</a:t>
             </a:r>
           </a:p>
           <a:p>
             <a:pPr lvl="2"/>
             <a:r>
-              <a:rPr lang="en-US" smtClean="0"/>
+              <a:rPr lang="en-US"/>
               <a:t>Third level</a:t>
             </a:r>
           </a:p>
           <a:p>
             <a:pPr lvl="3"/>
             <a:r>
-              <a:rPr lang="en-US" smtClean="0"/>
+              <a:rPr lang="en-US"/>
               <a:t>Fourth level</a:t>
             </a:r>
           </a:p>
           <a:p>
             <a:pPr lvl="4"/>
             <a:r>
-              <a:rPr lang="en-US" smtClean="0"/>
+              <a:rPr lang="en-US"/>
               <a:t>Fifth level</a:t>
             </a:r>
             <a:endParaRPr lang="en-US" dirty="0"/>
@@ -3519,7 +3530,7 @@
           <a:p>
             <a:fld id="{335D1D77-CA2D-4434-9216-5DA5E134C8E7}" type="datetimeFigureOut">
               <a:rPr lang="en-IN" smtClean="0"/>
-              <a:t>01-07-2025</a:t>
+              <a:t>08-09-2026</a:t>
             </a:fld>
             <a:endParaRPr lang="en-IN"/>
           </a:p>
@@ -3617,7 +3628,7 @@
           </a:lstStyle>
           <a:p>
             <a:r>
-              <a:rPr lang="en-US" smtClean="0"/>
+              <a:rPr lang="en-US"/>
               <a:t>Click to edit Master title style</a:t>
             </a:r>
             <a:endParaRPr lang="en-US" dirty="0"/>
@@ -3737,7 +3748,7 @@
           <a:p>
             <a:pPr lvl="0"/>
             <a:r>
-              <a:rPr lang="en-US" smtClean="0"/>
+              <a:rPr lang="en-US"/>
               <a:t>Click to edit Master text styles</a:t>
             </a:r>
           </a:p>
@@ -3760,7 +3771,7 @@
           <a:p>
             <a:fld id="{335D1D77-CA2D-4434-9216-5DA5E134C8E7}" type="datetimeFigureOut">
               <a:rPr lang="en-IN" smtClean="0"/>
-              <a:t>01-07-2025</a:t>
+              <a:t>08-09-2026</a:t>
             </a:fld>
             <a:endParaRPr lang="en-IN"/>
           </a:p>
@@ -3849,10 +3860,9 @@
           <a:lstStyle/>
           <a:p>
             <a:r>
-              <a:rPr lang="en-US" smtClean="0"/>
+              <a:rPr lang="en-US"/>
               <a:t>Click to edit Master title style</a:t>
             </a:r>
-            <a:endParaRPr lang="en-US"/>
           </a:p>
         </p:txBody>
       </p:sp>
@@ -3873,7 +3883,7 @@
           <a:p>
             <a:fld id="{335D1D77-CA2D-4434-9216-5DA5E134C8E7}" type="datetimeFigureOut">
               <a:rPr lang="en-IN" smtClean="0"/>
-              <a:t>01-07-2025</a:t>
+              <a:t>08-09-2026</a:t>
             </a:fld>
             <a:endParaRPr lang="en-IN"/>
           </a:p>
@@ -3943,35 +3953,35 @@
           <a:p>
             <a:pPr lvl="0"/>
             <a:r>
-              <a:rPr lang="en-US" smtClean="0"/>
+              <a:rPr lang="en-US"/>
               <a:t>Click to edit Master text styles</a:t>
             </a:r>
           </a:p>
           <a:p>
             <a:pPr lvl="1"/>
             <a:r>
-              <a:rPr lang="en-US" smtClean="0"/>
+              <a:rPr lang="en-US"/>
               <a:t>Second level</a:t>
             </a:r>
           </a:p>
           <a:p>
             <a:pPr lvl="2"/>
             <a:r>
-              <a:rPr lang="en-US" smtClean="0"/>
+              <a:rPr lang="en-US"/>
               <a:t>Third level</a:t>
             </a:r>
           </a:p>
           <a:p>
             <a:pPr lvl="3"/>
             <a:r>
-              <a:rPr lang="en-US" smtClean="0"/>
+              <a:rPr lang="en-US"/>
               <a:t>Fourth level</a:t>
             </a:r>
           </a:p>
           <a:p>
             <a:pPr lvl="4"/>
             <a:r>
-              <a:rPr lang="en-US" smtClean="0"/>
+              <a:rPr lang="en-US"/>
               <a:t>Fifth level</a:t>
             </a:r>
             <a:endParaRPr lang="en-US" dirty="0"/>
@@ -4000,38 +4010,37 @@
           <a:p>
             <a:pPr lvl="0"/>
             <a:r>
-              <a:rPr lang="en-US" smtClean="0"/>
+              <a:rPr lang="en-US"/>
               <a:t>Click to edit Master text styles</a:t>
             </a:r>
           </a:p>
           <a:p>
             <a:pPr lvl="1"/>
             <a:r>
-              <a:rPr lang="en-US" smtClean="0"/>
+              <a:rPr lang="en-US"/>
               <a:t>Second level</a:t>
             </a:r>
           </a:p>
           <a:p>
             <a:pPr lvl="2"/>
             <a:r>
-              <a:rPr lang="en-US" smtClean="0"/>
+              <a:rPr lang="en-US"/>
               <a:t>Third level</a:t>
             </a:r>
           </a:p>
           <a:p>
             <a:pPr lvl="3"/>
             <a:r>
-              <a:rPr lang="en-US" smtClean="0"/>
+              <a:rPr lang="en-US"/>
               <a:t>Fourth level</a:t>
             </a:r>
           </a:p>
           <a:p>
             <a:pPr lvl="4"/>
             <a:r>
-              <a:rPr lang="en-US" smtClean="0"/>
+              <a:rPr lang="en-US"/>
               <a:t>Fifth level</a:t>
             </a:r>
-            <a:endParaRPr lang="en-US"/>
           </a:p>
         </p:txBody>
       </p:sp>
@@ -4080,10 +4089,9 @@
           </a:lstStyle>
           <a:p>
             <a:r>
-              <a:rPr lang="en-US" smtClean="0"/>
+              <a:rPr lang="en-US"/>
               <a:t>Click to edit Master title style</a:t>
             </a:r>
-            <a:endParaRPr lang="en-US"/>
           </a:p>
         </p:txBody>
       </p:sp>
@@ -4150,7 +4158,7 @@
           <a:p>
             <a:pPr lvl="0"/>
             <a:r>
-              <a:rPr lang="en-US" smtClean="0"/>
+              <a:rPr lang="en-US"/>
               <a:t>Click to edit Master text styles</a:t>
             </a:r>
           </a:p>
@@ -4206,35 +4214,35 @@
           <a:p>
             <a:pPr lvl="0"/>
             <a:r>
-              <a:rPr lang="en-US" smtClean="0"/>
+              <a:rPr lang="en-US"/>
               <a:t>Click to edit Master text styles</a:t>
             </a:r>
           </a:p>
           <a:p>
             <a:pPr lvl="1"/>
             <a:r>
-              <a:rPr lang="en-US" smtClean="0"/>
+              <a:rPr lang="en-US"/>
               <a:t>Second level</a:t>
             </a:r>
           </a:p>
           <a:p>
             <a:pPr lvl="2"/>
             <a:r>
-              <a:rPr lang="en-US" smtClean="0"/>
+              <a:rPr lang="en-US"/>
               <a:t>Third level</a:t>
             </a:r>
           </a:p>
           <a:p>
             <a:pPr lvl="3"/>
             <a:r>
-              <a:rPr lang="en-US" smtClean="0"/>
+              <a:rPr lang="en-US"/>
               <a:t>Fourth level</a:t>
             </a:r>
           </a:p>
           <a:p>
             <a:pPr lvl="4"/>
             <a:r>
-              <a:rPr lang="en-US" smtClean="0"/>
+              <a:rPr lang="en-US"/>
               <a:t>Fifth level</a:t>
             </a:r>
             <a:endParaRPr lang="en-US" dirty="0"/>
@@ -4304,7 +4312,7 @@
           <a:p>
             <a:pPr lvl="0"/>
             <a:r>
-              <a:rPr lang="en-US" smtClean="0"/>
+              <a:rPr lang="en-US"/>
               <a:t>Click to edit Master text styles</a:t>
             </a:r>
           </a:p>
@@ -4360,35 +4368,35 @@
           <a:p>
             <a:pPr lvl="0"/>
             <a:r>
-              <a:rPr lang="en-US" smtClean="0"/>
+              <a:rPr lang="en-US"/>
               <a:t>Click to edit Master text styles</a:t>
             </a:r>
           </a:p>
           <a:p>
             <a:pPr lvl="1"/>
             <a:r>
-              <a:rPr lang="en-US" smtClean="0"/>
+              <a:rPr lang="en-US"/>
               <a:t>Second level</a:t>
             </a:r>
           </a:p>
           <a:p>
             <a:pPr lvl="2"/>
             <a:r>
-              <a:rPr lang="en-US" smtClean="0"/>
+              <a:rPr lang="en-US"/>
               <a:t>Third level</a:t>
             </a:r>
           </a:p>
           <a:p>
             <a:pPr lvl="3"/>
             <a:r>
-              <a:rPr lang="en-US" smtClean="0"/>
+              <a:rPr lang="en-US"/>
               <a:t>Fourth level</a:t>
             </a:r>
           </a:p>
           <a:p>
             <a:pPr lvl="4"/>
             <a:r>
-              <a:rPr lang="en-US" smtClean="0"/>
+              <a:rPr lang="en-US"/>
               <a:t>Fifth level</a:t>
             </a:r>
             <a:endParaRPr lang="en-US" dirty="0"/>
@@ -4412,7 +4420,7 @@
           <a:p>
             <a:fld id="{335D1D77-CA2D-4434-9216-5DA5E134C8E7}" type="datetimeFigureOut">
               <a:rPr lang="en-IN" smtClean="0"/>
-              <a:t>01-07-2025</a:t>
+              <a:t>08-09-2026</a:t>
             </a:fld>
             <a:endParaRPr lang="en-IN"/>
           </a:p>
@@ -4501,10 +4509,9 @@
           <a:lstStyle/>
           <a:p>
             <a:r>
-              <a:rPr lang="en-US" smtClean="0"/>
+              <a:rPr lang="en-US"/>
               <a:t>Click to edit Master title style</a:t>
             </a:r>
-            <a:endParaRPr lang="en-US"/>
           </a:p>
         </p:txBody>
       </p:sp>
@@ -4525,7 +4532,7 @@
           <a:p>
             <a:fld id="{335D1D77-CA2D-4434-9216-5DA5E134C8E7}" type="datetimeFigureOut">
               <a:rPr lang="en-IN" smtClean="0"/>
-              <a:t>01-07-2025</a:t>
+              <a:t>08-09-2026</a:t>
             </a:fld>
             <a:endParaRPr lang="en-IN"/>
           </a:p>
@@ -4615,7 +4622,7 @@
           <a:p>
             <a:fld id="{335D1D77-CA2D-4434-9216-5DA5E134C8E7}" type="datetimeFigureOut">
               <a:rPr lang="en-IN" smtClean="0"/>
-              <a:t>01-07-2025</a:t>
+              <a:t>08-09-2026</a:t>
             </a:fld>
             <a:endParaRPr lang="en-IN"/>
           </a:p>
@@ -7266,7 +7273,7 @@
           <a:p>
             <a:fld id="{335D1D77-CA2D-4434-9216-5DA5E134C8E7}" type="datetimeFigureOut">
               <a:rPr lang="en-IN" smtClean="0"/>
-              <a:t>01-07-2025</a:t>
+              <a:t>08-09-2026</a:t>
             </a:fld>
             <a:endParaRPr lang="en-IN"/>
           </a:p>
@@ -7393,35 +7400,35 @@
           <a:p>
             <a:pPr lvl="0"/>
             <a:r>
-              <a:rPr lang="en-US" smtClean="0"/>
+              <a:rPr lang="en-US"/>
               <a:t>Click to edit Master text styles</a:t>
             </a:r>
           </a:p>
           <a:p>
             <a:pPr lvl="1"/>
             <a:r>
-              <a:rPr lang="en-US" smtClean="0"/>
+              <a:rPr lang="en-US"/>
               <a:t>Second level</a:t>
             </a:r>
           </a:p>
           <a:p>
             <a:pPr lvl="2"/>
             <a:r>
-              <a:rPr lang="en-US" smtClean="0"/>
+              <a:rPr lang="en-US"/>
               <a:t>Third level</a:t>
             </a:r>
           </a:p>
           <a:p>
             <a:pPr lvl="3"/>
             <a:r>
-              <a:rPr lang="en-US" smtClean="0"/>
+              <a:rPr lang="en-US"/>
               <a:t>Fourth level</a:t>
             </a:r>
           </a:p>
           <a:p>
             <a:pPr lvl="4"/>
             <a:r>
-              <a:rPr lang="en-US" smtClean="0"/>
+              <a:rPr lang="en-US"/>
               <a:t>Fifth level</a:t>
             </a:r>
             <a:endParaRPr lang="en-US" dirty="0"/>
@@ -7527,10 +7534,9 @@
           </a:lstStyle>
           <a:p>
             <a:r>
-              <a:rPr lang="en-US" smtClean="0"/>
+              <a:rPr lang="en-US"/>
               <a:t>Click to edit Master title style</a:t>
             </a:r>
-            <a:endParaRPr lang="en-US"/>
           </a:p>
         </p:txBody>
       </p:sp>
@@ -7599,7 +7605,7 @@
           <a:p>
             <a:pPr lvl="0"/>
             <a:r>
-              <a:rPr lang="en-US" smtClean="0"/>
+              <a:rPr lang="en-US"/>
               <a:t>Click to edit Master text styles</a:t>
             </a:r>
           </a:p>
@@ -10314,10 +10320,9 @@
           </a:lstStyle>
           <a:p>
             <a:r>
-              <a:rPr lang="en-US" smtClean="0"/>
+              <a:rPr lang="en-US"/>
               <a:t>Click to edit Master title style</a:t>
             </a:r>
-            <a:endParaRPr lang="en-US"/>
           </a:p>
         </p:txBody>
       </p:sp>
@@ -10383,7 +10388,7 @@
           </a:lstStyle>
           <a:p>
             <a:r>
-              <a:rPr lang="en-US" smtClean="0"/>
+              <a:rPr lang="en-US"/>
               <a:t>Click icon to add picture</a:t>
             </a:r>
             <a:endParaRPr lang="en-US" dirty="0"/>
@@ -10455,7 +10460,7 @@
           <a:p>
             <a:pPr lvl="0"/>
             <a:r>
-              <a:rPr lang="en-US" smtClean="0"/>
+              <a:rPr lang="en-US"/>
               <a:t>Click to edit Master text styles</a:t>
             </a:r>
           </a:p>
@@ -10478,7 +10483,7 @@
           <a:p>
             <a:fld id="{335D1D77-CA2D-4434-9216-5DA5E134C8E7}" type="datetimeFigureOut">
               <a:rPr lang="en-IN" smtClean="0"/>
-              <a:t>01-07-2025</a:t>
+              <a:t>08-09-2026</a:t>
             </a:fld>
             <a:endParaRPr lang="en-IN"/>
           </a:p>
@@ -13198,7 +13203,7 @@
           <a:lstStyle/>
           <a:p>
             <a:r>
-              <a:rPr lang="en-US" smtClean="0"/>
+              <a:rPr lang="en-US"/>
               <a:t>Click to edit Master title style</a:t>
             </a:r>
             <a:endParaRPr lang="en-US" dirty="0"/>
@@ -13232,35 +13237,35 @@
           <a:p>
             <a:pPr lvl="0"/>
             <a:r>
-              <a:rPr lang="en-US" smtClean="0"/>
+              <a:rPr lang="en-US"/>
               <a:t>Click to edit Master text styles</a:t>
             </a:r>
           </a:p>
           <a:p>
             <a:pPr lvl="1"/>
             <a:r>
-              <a:rPr lang="en-US" smtClean="0"/>
+              <a:rPr lang="en-US"/>
               <a:t>Second level</a:t>
             </a:r>
           </a:p>
           <a:p>
             <a:pPr lvl="2"/>
             <a:r>
-              <a:rPr lang="en-US" smtClean="0"/>
+              <a:rPr lang="en-US"/>
               <a:t>Third level</a:t>
             </a:r>
           </a:p>
           <a:p>
             <a:pPr lvl="3"/>
             <a:r>
-              <a:rPr lang="en-US" smtClean="0"/>
+              <a:rPr lang="en-US"/>
               <a:t>Fourth level</a:t>
             </a:r>
           </a:p>
           <a:p>
             <a:pPr lvl="4"/>
             <a:r>
-              <a:rPr lang="en-US" smtClean="0"/>
+              <a:rPr lang="en-US"/>
               <a:t>Fifth level</a:t>
             </a:r>
             <a:endParaRPr lang="en-US" dirty="0"/>
@@ -13300,7 +13305,7 @@
           <a:p>
             <a:fld id="{335D1D77-CA2D-4434-9216-5DA5E134C8E7}" type="datetimeFigureOut">
               <a:rPr lang="en-IN" smtClean="0"/>
-              <a:t>01-07-2025</a:t>
+              <a:t>08-09-2026</a:t>
             </a:fld>
             <a:endParaRPr lang="en-IN"/>
           </a:p>
@@ -13800,13 +13805,6 @@
   <p:clrMapOvr>
     <a:masterClrMapping/>
   </p:clrMapOvr>
-  <p:timing>
-    <p:tnLst>
-      <p:par>
-        <p:cTn id="1" dur="indefinite" restart="never" nodeType="tmRoot"/>
-      </p:par>
-    </p:tnLst>
-  </p:timing>
 </p:sld>
 </file>
 
@@ -13924,13 +13922,6 @@
   <p:clrMapOvr>
     <a:masterClrMapping/>
   </p:clrMapOvr>
-  <p:timing>
-    <p:tnLst>
-      <p:par>
-        <p:cTn id="1" dur="indefinite" restart="never" nodeType="tmRoot"/>
-      </p:par>
-    </p:tnLst>
-  </p:timing>
 </p:sld>
 </file>
 
@@ -13979,14 +13970,7 @@
                 <a:latin typeface="Times New Roman" pitchFamily="18" charset="0"/>
                 <a:cs typeface="Times New Roman" pitchFamily="18" charset="0"/>
               </a:rPr>
-              <a:t>Cyber law-historical </a:t>
-            </a:r>
-            <a:r>
-              <a:rPr lang="en-IN" b="1" dirty="0" smtClean="0">
-                <a:latin typeface="Times New Roman" pitchFamily="18" charset="0"/>
-                <a:cs typeface="Times New Roman" pitchFamily="18" charset="0"/>
-              </a:rPr>
-              <a:t>perspectives</a:t>
+              <a:t>Cyber law-historical perspectives</a:t>
             </a:r>
           </a:p>
           <a:p>
@@ -13998,14 +13982,7 @@
                 <a:latin typeface="Times New Roman" pitchFamily="18" charset="0"/>
                 <a:cs typeface="Times New Roman" pitchFamily="18" charset="0"/>
               </a:rPr>
-              <a:t>Cyber law, encompassing regulations related to computer networks and cyberspace, has a complex history marked by evolution and adaptation. Early developments focused on data protection and computer fraud, while the internet boom and the rise of the digital age spurred a broader need for cyber law</a:t>
-            </a:r>
-            <a:r>
-              <a:rPr lang="en-US" dirty="0" smtClean="0">
-                <a:latin typeface="Times New Roman" pitchFamily="18" charset="0"/>
-                <a:cs typeface="Times New Roman" pitchFamily="18" charset="0"/>
-              </a:rPr>
-              <a:t>.</a:t>
+              <a:t>Cyber law, encompassing regulations related to computer networks and cyberspace, has a complex history marked by evolution and adaptation. Early developments focused on data protection and computer fraud, while the internet boom and the rise of the digital age spurred a broader need for cyber law.</a:t>
             </a:r>
           </a:p>
           <a:p>
@@ -14013,18 +13990,11 @@
               <a:buNone/>
             </a:pPr>
             <a:r>
-              <a:rPr lang="en-US" dirty="0" smtClean="0">
-                <a:latin typeface="Times New Roman" pitchFamily="18" charset="0"/>
-                <a:cs typeface="Times New Roman" pitchFamily="18" charset="0"/>
-              </a:rPr>
-              <a:t>1 </a:t>
-            </a:r>
-            <a:r>
               <a:rPr lang="en-US" dirty="0">
                 <a:latin typeface="Times New Roman" pitchFamily="18" charset="0"/>
                 <a:cs typeface="Times New Roman" pitchFamily="18" charset="0"/>
               </a:rPr>
-              <a:t>Early Developments (1970s-1980s):</a:t>
+              <a:t>1 Early Developments (1970s-1980s):</a:t>
             </a:r>
           </a:p>
           <a:p>
@@ -14067,13 +14037,6 @@
   <p:clrMapOvr>
     <a:masterClrMapping/>
   </p:clrMapOvr>
-  <p:timing>
-    <p:tnLst>
-      <p:par>
-        <p:cTn id="1" dur="indefinite" restart="never" nodeType="tmRoot"/>
-      </p:par>
-    </p:tnLst>
-  </p:timing>
 </p:sld>
 </file>
 
@@ -14127,7 +14090,6 @@
               <a:rPr lang="en-US" dirty="0"/>
               <a:t>The rapid growth of the internet in the 1990s raised new legal challenges, particularly regarding online communication, e-commerce, and digital signatures. </a:t>
             </a:r>
-            <a:endParaRPr lang="en-US" dirty="0" smtClean="0"/>
           </a:p>
           <a:p>
             <a:pPr marL="68580" indent="0">
@@ -14178,13 +14140,6 @@
   <p:clrMapOvr>
     <a:masterClrMapping/>
   </p:clrMapOvr>
-  <p:timing>
-    <p:tnLst>
-      <p:par>
-        <p:cTn id="1" dur="indefinite" restart="never" nodeType="tmRoot"/>
-      </p:par>
-    </p:tnLst>
-  </p:timing>
 </p:sld>
 </file>
 
@@ -14244,7 +14199,6 @@
               <a:rPr lang="en-US" sz="2600" dirty="0"/>
               <a:t>Cyber laws are not limited to individual nations and are increasingly addressing the global nature of cyberspace. </a:t>
             </a:r>
-            <a:endParaRPr lang="en-US" sz="2600" dirty="0" smtClean="0"/>
           </a:p>
           <a:p>
             <a:r>
@@ -14265,12 +14219,8 @@
               <a:buNone/>
             </a:pPr>
             <a:r>
-              <a:rPr lang="en-US" sz="2600" dirty="0" smtClean="0"/>
-              <a:t>5</a:t>
-            </a:r>
-            <a:r>
               <a:rPr lang="en-US" sz="2600" dirty="0"/>
-              <a:t>. Current Trends and Challenges:</a:t>
+              <a:t>5. Current Trends and Challenges:</a:t>
             </a:r>
           </a:p>
           <a:p>
@@ -14309,13 +14259,6 @@
   <p:clrMapOvr>
     <a:masterClrMapping/>
   </p:clrMapOvr>
-  <p:timing>
-    <p:tnLst>
-      <p:par>
-        <p:cTn id="1" dur="indefinite" restart="never" nodeType="tmRoot"/>
-      </p:par>
-    </p:tnLst>
-  </p:timing>
 </p:sld>
 </file>
 
@@ -14360,7 +14303,7 @@
               <a:buNone/>
             </a:pPr>
             <a:r>
-              <a:rPr lang="en-US" b="1" dirty="0" smtClean="0">
+              <a:rPr lang="en-US" b="1" dirty="0">
                 <a:latin typeface="Times New Roman" pitchFamily="18" charset="0"/>
                 <a:cs typeface="Times New Roman" pitchFamily="18" charset="0"/>
               </a:rPr>
@@ -14378,10 +14321,6 @@
               </a:rPr>
               <a:t>Cyberspace is the virtual space created by interconnected computer networks and the internet. It's where digital information, communication, and interactions take place. </a:t>
             </a:r>
-            <a:endParaRPr lang="en-US" dirty="0" smtClean="0">
-              <a:latin typeface="Times New Roman" pitchFamily="18" charset="0"/>
-              <a:cs typeface="Times New Roman" pitchFamily="18" charset="0"/>
-            </a:endParaRPr>
           </a:p>
           <a:p>
             <a:pPr marL="68580" indent="0">
@@ -14394,10 +14333,6 @@
               </a:rPr>
               <a:t>Cyberspace includes the Internet, telecommunications networks, computer systems, and other networked devices. </a:t>
             </a:r>
-            <a:endParaRPr lang="en-US" dirty="0" smtClean="0">
-              <a:latin typeface="Times New Roman" pitchFamily="18" charset="0"/>
-              <a:cs typeface="Times New Roman" pitchFamily="18" charset="0"/>
-            </a:endParaRPr>
           </a:p>
           <a:p>
             <a:pPr marL="68580" indent="0">
@@ -14410,10 +14345,6 @@
               </a:rPr>
               <a:t>It enables communication, information access, online shopping, social media engagement, and a vast array of other digital activities. </a:t>
             </a:r>
-            <a:endParaRPr lang="en-US" dirty="0" smtClean="0">
-              <a:latin typeface="Times New Roman" pitchFamily="18" charset="0"/>
-              <a:cs typeface="Times New Roman" pitchFamily="18" charset="0"/>
-            </a:endParaRPr>
           </a:p>
           <a:p>
             <a:pPr marL="68580" indent="0">
@@ -14457,13 +14388,6 @@
   <p:clrMapOvr>
     <a:masterClrMapping/>
   </p:clrMapOvr>
-  <p:timing>
-    <p:tnLst>
-      <p:par>
-        <p:cTn id="1" dur="indefinite" restart="never" nodeType="tmRoot"/>
-      </p:par>
-    </p:tnLst>
-  </p:timing>
 </p:sld>
 </file>
 
@@ -14508,46 +14432,25 @@
               <a:buNone/>
             </a:pPr>
             <a:r>
-              <a:rPr lang="en-US" b="1" dirty="0" smtClean="0">
-                <a:latin typeface="Times New Roman" pitchFamily="18" charset="0"/>
-                <a:cs typeface="Times New Roman" pitchFamily="18" charset="0"/>
-              </a:rPr>
-              <a:t>Deception </a:t>
-            </a:r>
-            <a:r>
               <a:rPr lang="en-US" b="1" dirty="0">
                 <a:latin typeface="Times New Roman" pitchFamily="18" charset="0"/>
                 <a:cs typeface="Times New Roman" pitchFamily="18" charset="0"/>
               </a:rPr>
-              <a:t>by </a:t>
-            </a:r>
-            <a:r>
-              <a:rPr lang="en-US" dirty="0" smtClean="0">
+              <a:t>Deception by </a:t>
+            </a:r>
+            <a:r>
+              <a:rPr lang="en-US" dirty="0">
                 <a:latin typeface="Times New Roman" pitchFamily="18" charset="0"/>
                 <a:cs typeface="Times New Roman" pitchFamily="18" charset="0"/>
               </a:rPr>
               <a:t>squatting</a:t>
             </a:r>
             <a:r>
-              <a:rPr lang="en-US" b="1" dirty="0" smtClean="0">
-                <a:latin typeface="Times New Roman" pitchFamily="18" charset="0"/>
-                <a:cs typeface="Times New Roman" pitchFamily="18" charset="0"/>
-              </a:rPr>
-              <a:t> </a:t>
-            </a:r>
-            <a:r>
               <a:rPr lang="en-US" b="1" dirty="0">
                 <a:latin typeface="Times New Roman" pitchFamily="18" charset="0"/>
                 <a:cs typeface="Times New Roman" pitchFamily="18" charset="0"/>
               </a:rPr>
-              <a:t>in </a:t>
-            </a:r>
-            <a:r>
-              <a:rPr lang="en-US" b="1" dirty="0" smtClean="0">
-                <a:latin typeface="Times New Roman" pitchFamily="18" charset="0"/>
-                <a:cs typeface="Times New Roman" pitchFamily="18" charset="0"/>
-              </a:rPr>
-              <a:t>cyberspace</a:t>
+              <a:t> in cyberspace</a:t>
             </a:r>
           </a:p>
           <a:p>
@@ -14561,33 +14464,18 @@
               </a:rPr>
               <a:t>Cybersquatting is also known as domain squatting, which involves registering domain names that are identical or confusingly similar to existing trademarks, company names, or personal names. </a:t>
             </a:r>
-            <a:endParaRPr lang="en-US" dirty="0" smtClean="0">
-              <a:latin typeface="Times New Roman" pitchFamily="18" charset="0"/>
-              <a:cs typeface="Times New Roman" pitchFamily="18" charset="0"/>
-            </a:endParaRPr>
           </a:p>
           <a:p>
             <a:pPr marL="68580" indent="0">
               <a:buNone/>
             </a:pPr>
             <a:r>
-              <a:rPr lang="en-US" dirty="0" smtClean="0">
-                <a:latin typeface="Times New Roman" pitchFamily="18" charset="0"/>
-                <a:cs typeface="Times New Roman" pitchFamily="18" charset="0"/>
-              </a:rPr>
-              <a:t>Cyber squatters </a:t>
-            </a:r>
-            <a:r>
               <a:rPr lang="en-US" dirty="0">
                 <a:latin typeface="Times New Roman" pitchFamily="18" charset="0"/>
                 <a:cs typeface="Times New Roman" pitchFamily="18" charset="0"/>
               </a:rPr>
-              <a:t>often register domain names with the intention of deceiving internet users into thinking they are accessing the legitimate website, leading to potential fraud, data theft, or other harmful consequences. </a:t>
-            </a:r>
-            <a:endParaRPr lang="en-US" dirty="0" smtClean="0">
-              <a:latin typeface="Times New Roman" pitchFamily="18" charset="0"/>
-              <a:cs typeface="Times New Roman" pitchFamily="18" charset="0"/>
-            </a:endParaRPr>
+              <a:t>Cyber squatters often register domain names with the intention of deceiving internet users into thinking they are accessing the legitimate website, leading to potential fraud, data theft, or other harmful consequences. </a:t>
+            </a:r>
           </a:p>
           <a:p>
             <a:pPr marL="68580" indent="0">
@@ -14636,13 +14524,6 @@
   <p:clrMapOvr>
     <a:masterClrMapping/>
   </p:clrMapOvr>
-  <p:timing>
-    <p:tnLst>
-      <p:par>
-        <p:cTn id="1" dur="indefinite" restart="never" nodeType="tmRoot"/>
-      </p:par>
-    </p:tnLst>
-  </p:timing>
 </p:sld>
 </file>
 
@@ -14719,10 +14600,6 @@
               </a:rPr>
               <a:t>Combo Squatting: Adding words to well-known brands (e.g., "nike-outlet-sale.com"). </a:t>
             </a:r>
-            <a:endParaRPr lang="en-US" dirty="0" smtClean="0">
-              <a:latin typeface="Times New Roman" pitchFamily="18" charset="0"/>
-              <a:cs typeface="Times New Roman" pitchFamily="18" charset="0"/>
-            </a:endParaRPr>
           </a:p>
           <a:p>
             <a:pPr marL="68580" indent="0">
@@ -14766,10 +14643,6 @@
               </a:rPr>
               <a:t> may create clone websites of legitimate businesses, deceiving users into trusting these fake sites and potentially leading to phishing attempts or data theft. </a:t>
             </a:r>
-            <a:endParaRPr lang="en-US" dirty="0" smtClean="0">
-              <a:latin typeface="Times New Roman" pitchFamily="18" charset="0"/>
-              <a:cs typeface="Times New Roman" pitchFamily="18" charset="0"/>
-            </a:endParaRPr>
           </a:p>
           <a:p>
             <a:pPr marL="68580" indent="0">
@@ -14818,13 +14691,6 @@
   <p:clrMapOvr>
     <a:masterClrMapping/>
   </p:clrMapOvr>
-  <p:timing>
-    <p:tnLst>
-      <p:par>
-        <p:cTn id="1" dur="indefinite" restart="never" nodeType="tmRoot"/>
-      </p:par>
-    </p:tnLst>
-  </p:timing>
 </p:sld>
 </file>
 
@@ -14873,14 +14739,7 @@
                 <a:latin typeface="Times New Roman" pitchFamily="18" charset="0"/>
                 <a:cs typeface="Times New Roman" pitchFamily="18" charset="0"/>
               </a:rPr>
-              <a:t>protection of copyright on </a:t>
-            </a:r>
-            <a:r>
-              <a:rPr lang="en-US" b="1" dirty="0" smtClean="0">
-                <a:latin typeface="Times New Roman" pitchFamily="18" charset="0"/>
-                <a:cs typeface="Times New Roman" pitchFamily="18" charset="0"/>
-              </a:rPr>
-              <a:t>cyberspace</a:t>
+              <a:t>protection of copyright on cyberspace</a:t>
             </a:r>
           </a:p>
           <a:p>
@@ -14894,10 +14753,6 @@
               </a:rPr>
               <a:t>Protection of copyright in cyberspace is a critical aspect of digital rights management and intellectual property law, especially given the ease with which content can be copied, shared, or modified online. </a:t>
             </a:r>
-            <a:endParaRPr lang="en-US" dirty="0" smtClean="0">
-              <a:latin typeface="Times New Roman" pitchFamily="18" charset="0"/>
-              <a:cs typeface="Times New Roman" pitchFamily="18" charset="0"/>
-            </a:endParaRPr>
           </a:p>
           <a:p>
             <a:pPr marL="68580" indent="0">
@@ -14908,14 +14763,7 @@
                 <a:latin typeface="Times New Roman" pitchFamily="18" charset="0"/>
                 <a:cs typeface="Times New Roman" pitchFamily="18" charset="0"/>
               </a:rPr>
-              <a:t>how copyright is protected in </a:t>
-            </a:r>
-            <a:r>
-              <a:rPr lang="en-US" dirty="0" smtClean="0">
-                <a:latin typeface="Times New Roman" pitchFamily="18" charset="0"/>
-                <a:cs typeface="Times New Roman" pitchFamily="18" charset="0"/>
-              </a:rPr>
-              <a:t>cyberspace</a:t>
+              <a:t>how copyright is protected in cyberspace</a:t>
             </a:r>
           </a:p>
           <a:p>
@@ -14923,7 +14771,7 @@
               <a:buAutoNum type="arabicPeriod"/>
             </a:pPr>
             <a:r>
-              <a:rPr lang="en-US" dirty="0" smtClean="0">
+              <a:rPr lang="en-US" dirty="0">
                 <a:latin typeface="Times New Roman" pitchFamily="18" charset="0"/>
                 <a:cs typeface="Times New Roman" pitchFamily="18" charset="0"/>
               </a:rPr>
@@ -14939,14 +14787,7 @@
                 <a:latin typeface="Times New Roman" pitchFamily="18" charset="0"/>
                 <a:cs typeface="Times New Roman" pitchFamily="18" charset="0"/>
               </a:rPr>
-              <a:t>Legal frameworks in cyberspace refer to the body of laws, regulations, and standards that govern online activities and protect users from cybercrimes and threats</a:t>
-            </a:r>
-            <a:r>
-              <a:rPr lang="en-US" dirty="0" smtClean="0">
-                <a:latin typeface="Times New Roman" pitchFamily="18" charset="0"/>
-                <a:cs typeface="Times New Roman" pitchFamily="18" charset="0"/>
-              </a:rPr>
-              <a:t>.</a:t>
+              <a:t>Legal frameworks in cyberspace refer to the body of laws, regulations, and standards that govern online activities and protect users from cybercrimes and threats.</a:t>
             </a:r>
           </a:p>
           <a:p>
@@ -14958,14 +14799,7 @@
                 <a:latin typeface="Times New Roman" pitchFamily="18" charset="0"/>
                 <a:cs typeface="Times New Roman" pitchFamily="18" charset="0"/>
               </a:rPr>
-              <a:t>Data Protection and </a:t>
-            </a:r>
-            <a:r>
-              <a:rPr lang="en-IN" dirty="0" smtClean="0">
-                <a:latin typeface="Times New Roman" pitchFamily="18" charset="0"/>
-                <a:cs typeface="Times New Roman" pitchFamily="18" charset="0"/>
-              </a:rPr>
-              <a:t>Privacy</a:t>
+              <a:t>Data Protection and Privacy</a:t>
             </a:r>
           </a:p>
           <a:p>
@@ -14977,14 +14811,7 @@
                 <a:latin typeface="Times New Roman" pitchFamily="18" charset="0"/>
                 <a:cs typeface="Times New Roman" pitchFamily="18" charset="0"/>
               </a:rPr>
-              <a:t>Cybercrime </a:t>
-            </a:r>
-            <a:r>
-              <a:rPr lang="en-IN" dirty="0" smtClean="0">
-                <a:latin typeface="Times New Roman" pitchFamily="18" charset="0"/>
-                <a:cs typeface="Times New Roman" pitchFamily="18" charset="0"/>
-              </a:rPr>
-              <a:t>Prevention</a:t>
+              <a:t>Cybercrime Prevention</a:t>
             </a:r>
           </a:p>
           <a:p>
@@ -15011,13 +14838,6 @@
   <p:clrMapOvr>
     <a:masterClrMapping/>
   </p:clrMapOvr>
-  <p:timing>
-    <p:tnLst>
-      <p:par>
-        <p:cTn id="1" dur="indefinite" restart="never" nodeType="tmRoot"/>
-      </p:par>
-    </p:tnLst>
-  </p:timing>
 </p:sld>
 </file>
 
@@ -15068,14 +14888,7 @@
                 <a:latin typeface="Times New Roman" pitchFamily="18" charset="0"/>
                 <a:cs typeface="Times New Roman" pitchFamily="18" charset="0"/>
               </a:rPr>
-              <a:t>Intellectual Property </a:t>
-            </a:r>
-            <a:r>
-              <a:rPr lang="en-IN" dirty="0" smtClean="0">
-                <a:latin typeface="Times New Roman" pitchFamily="18" charset="0"/>
-                <a:cs typeface="Times New Roman" pitchFamily="18" charset="0"/>
-              </a:rPr>
-              <a:t>Protection</a:t>
+              <a:t>Intellectual Property Protection</a:t>
             </a:r>
           </a:p>
           <a:p>
@@ -15113,10 +14926,6 @@
               </a:rPr>
               <a:t>This act is a foundational legal framework in India, addressing cybercrimes, e-commerce, and digital signatures. </a:t>
             </a:r>
-            <a:endParaRPr lang="en-US" dirty="0" smtClean="0">
-              <a:latin typeface="Times New Roman" pitchFamily="18" charset="0"/>
-              <a:cs typeface="Times New Roman" pitchFamily="18" charset="0"/>
-            </a:endParaRPr>
           </a:p>
           <a:p>
             <a:pPr marL="68580" indent="0">
@@ -15141,10 +14950,6 @@
               </a:rPr>
               <a:t>The GDPR is a key regulation for data protection in the EU, setting standards for how personal data is handled. </a:t>
             </a:r>
-            <a:endParaRPr lang="en-US" dirty="0" smtClean="0">
-              <a:latin typeface="Times New Roman" pitchFamily="18" charset="0"/>
-              <a:cs typeface="Times New Roman" pitchFamily="18" charset="0"/>
-            </a:endParaRPr>
           </a:p>
           <a:p>
             <a:pPr marL="68580" indent="0">
@@ -15155,14 +14960,7 @@
                 <a:latin typeface="Times New Roman" pitchFamily="18" charset="0"/>
                 <a:cs typeface="Times New Roman" pitchFamily="18" charset="0"/>
               </a:rPr>
-              <a:t>2. Challenges in </a:t>
-            </a:r>
-            <a:r>
-              <a:rPr lang="en-US" dirty="0" smtClean="0">
-                <a:latin typeface="Times New Roman" pitchFamily="18" charset="0"/>
-                <a:cs typeface="Times New Roman" pitchFamily="18" charset="0"/>
-              </a:rPr>
-              <a:t>Cyberspace</a:t>
+              <a:t>2. Challenges in Cyberspace</a:t>
             </a:r>
           </a:p>
           <a:p>
@@ -15235,13 +15033,6 @@
   <p:clrMapOvr>
     <a:masterClrMapping/>
   </p:clrMapOvr>
-  <p:timing>
-    <p:tnLst>
-      <p:par>
-        <p:cTn id="1" dur="indefinite" restart="never" nodeType="tmRoot"/>
-      </p:par>
-    </p:tnLst>
-  </p:timing>
 </p:sld>
 </file>
 
@@ -15290,14 +15081,7 @@
                 <a:latin typeface="Times New Roman" pitchFamily="18" charset="0"/>
                 <a:cs typeface="Times New Roman" pitchFamily="18" charset="0"/>
               </a:rPr>
-              <a:t>3. Methods of </a:t>
-            </a:r>
-            <a:r>
-              <a:rPr lang="en-IN" dirty="0" smtClean="0">
-                <a:latin typeface="Times New Roman" pitchFamily="18" charset="0"/>
-                <a:cs typeface="Times New Roman" pitchFamily="18" charset="0"/>
-              </a:rPr>
-              <a:t>Protection</a:t>
+              <a:t>3. Methods of Protection</a:t>
             </a:r>
           </a:p>
           <a:p>
@@ -15337,14 +15121,7 @@
                 <a:latin typeface="Times New Roman" pitchFamily="18" charset="0"/>
                 <a:cs typeface="Times New Roman" pitchFamily="18" charset="0"/>
               </a:rPr>
-              <a:t> like YouTube use automated systems to detect and manage copyrighted material</a:t>
-            </a:r>
-            <a:r>
-              <a:rPr lang="en-US" dirty="0" smtClean="0">
-                <a:latin typeface="Times New Roman" pitchFamily="18" charset="0"/>
-                <a:cs typeface="Times New Roman" pitchFamily="18" charset="0"/>
-              </a:rPr>
-              <a:t>.</a:t>
+              <a:t> like YouTube use automated systems to detect and manage copyrighted material.</a:t>
             </a:r>
           </a:p>
           <a:p>
@@ -15356,14 +15133,7 @@
                 <a:latin typeface="Times New Roman" pitchFamily="18" charset="0"/>
                 <a:cs typeface="Times New Roman" pitchFamily="18" charset="0"/>
               </a:rPr>
-              <a:t>4. Enforcement and </a:t>
-            </a:r>
-            <a:r>
-              <a:rPr lang="en-US" dirty="0" smtClean="0">
-                <a:latin typeface="Times New Roman" pitchFamily="18" charset="0"/>
-                <a:cs typeface="Times New Roman" pitchFamily="18" charset="0"/>
-              </a:rPr>
-              <a:t>Regulation</a:t>
+              <a:t>4. Enforcement and Regulation</a:t>
             </a:r>
           </a:p>
           <a:p>
@@ -15371,18 +15141,11 @@
               <a:buNone/>
             </a:pPr>
             <a:r>
-              <a:rPr lang="en-US" dirty="0" smtClean="0">
-                <a:latin typeface="Times New Roman" pitchFamily="18" charset="0"/>
-                <a:cs typeface="Times New Roman" pitchFamily="18" charset="0"/>
-              </a:rPr>
-              <a:t>Monitoring </a:t>
-            </a:r>
-            <a:r>
               <a:rPr lang="en-US" dirty="0">
                 <a:latin typeface="Times New Roman" pitchFamily="18" charset="0"/>
                 <a:cs typeface="Times New Roman" pitchFamily="18" charset="0"/>
               </a:rPr>
-              <a:t>and Enforcement </a:t>
+              <a:t>Monitoring and Enforcement </a:t>
             </a:r>
             <a:r>
               <a:rPr lang="en-US" dirty="0" err="1">
@@ -15457,13 +15220,6 @@
   <p:clrMapOvr>
     <a:masterClrMapping/>
   </p:clrMapOvr>
-  <p:timing>
-    <p:tnLst>
-      <p:par>
-        <p:cTn id="1" dur="indefinite" restart="never" nodeType="tmRoot"/>
-      </p:par>
-    </p:tnLst>
-  </p:timing>
 </p:sld>
 </file>
 
@@ -15510,46 +15266,18 @@
               <a:buNone/>
             </a:pPr>
             <a:r>
-              <a:rPr lang="en-IN" sz="2600" dirty="0" smtClean="0">
-                <a:latin typeface="Times New Roman" pitchFamily="18" charset="0"/>
-                <a:cs typeface="Times New Roman" pitchFamily="18" charset="0"/>
-              </a:rPr>
-              <a:t>24MCCLFT304</a:t>
-            </a:r>
-            <a:r>
               <a:rPr lang="en-IN" sz="2600" dirty="0">
                 <a:latin typeface="Times New Roman" pitchFamily="18" charset="0"/>
                 <a:cs typeface="Times New Roman" pitchFamily="18" charset="0"/>
               </a:rPr>
-              <a:t>	</a:t>
-            </a:r>
-            <a:r>
-              <a:rPr lang="en-IN" sz="2600" dirty="0" smtClean="0">
-                <a:latin typeface="Times New Roman" pitchFamily="18" charset="0"/>
-                <a:cs typeface="Times New Roman" pitchFamily="18" charset="0"/>
-              </a:rPr>
-              <a:t>CYBER </a:t>
-            </a:r>
-            <a:r>
-              <a:rPr lang="en-IN" sz="2600" dirty="0">
-                <a:latin typeface="Times New Roman" pitchFamily="18" charset="0"/>
-                <a:cs typeface="Times New Roman" pitchFamily="18" charset="0"/>
-              </a:rPr>
-              <a:t>LAWS AND </a:t>
-            </a:r>
-            <a:r>
-              <a:rPr lang="en-IN" sz="2600" dirty="0" smtClean="0">
-                <a:latin typeface="Times New Roman" pitchFamily="18" charset="0"/>
-                <a:cs typeface="Times New Roman" pitchFamily="18" charset="0"/>
-              </a:rPr>
-              <a:t>FORENSICS</a:t>
+              <a:t>24MCCLFT304	CYBER LAWS AND FORENSICS</a:t>
             </a:r>
           </a:p>
           <a:p>
             <a:pPr marL="68580" indent="0">
               <a:buNone/>
             </a:pPr>
-            <a:endParaRPr lang="en-US" sz="2600" dirty="0" smtClean="0">
+            <a:endParaRPr lang="en-US" sz="2600" dirty="0">
               <a:solidFill>
                 <a:srgbClr val="000000"/>
               </a:solidFill>
@@ -15561,29 +15289,14 @@
               <a:buNone/>
             </a:pPr>
             <a:r>
-              <a:rPr lang="en-US" sz="2600" dirty="0" smtClean="0">
-                <a:solidFill>
-                  <a:srgbClr val="000000"/>
-                </a:solidFill>
-                <a:latin typeface="Times New Roman"/>
-              </a:rPr>
-              <a:t>CO1 </a:t>
-            </a:r>
-            <a:r>
               <a:rPr lang="en-US" sz="2600" dirty="0">
                 <a:solidFill>
                   <a:srgbClr val="000000"/>
                 </a:solidFill>
                 <a:latin typeface="Times New Roman"/>
               </a:rPr>
-              <a:t>	To understand the information technology act. </a:t>
-            </a:r>
-            <a:endParaRPr lang="en-US" sz="2600" dirty="0" smtClean="0">
-              <a:solidFill>
-                <a:srgbClr val="000000"/>
-              </a:solidFill>
-              <a:latin typeface="Times New Roman"/>
-            </a:endParaRPr>
+              <a:t>CO1 	To understand the information technology act. </a:t>
+            </a:r>
           </a:p>
           <a:p>
             <a:pPr marL="68580" indent="0">
@@ -15596,17 +15309,13 @@
                 </a:solidFill>
                 <a:latin typeface="Times New Roman"/>
               </a:rPr>
-              <a:t>CO2 	To understand various penalties related to </a:t>
-            </a:r>
-            <a:r>
-              <a:rPr lang="en-US" sz="2600" dirty="0" smtClean="0">
-                <a:solidFill>
-                  <a:srgbClr val="000000"/>
-                </a:solidFill>
-                <a:latin typeface="Times New Roman"/>
-              </a:rPr>
-              <a:t>	cybercrimes</a:t>
-            </a:r>
+              <a:t>CO2 	To understand various penalties related to 	cybercrimes. </a:t>
+            </a:r>
+          </a:p>
+          <a:p>
+            <a:pPr marL="68580" indent="0">
+              <a:buNone/>
+            </a:pPr>
             <a:r>
               <a:rPr lang="en-US" sz="2600" dirty="0">
                 <a:solidFill>
@@ -15614,14 +15323,8 @@
                 </a:solidFill>
                 <a:latin typeface="Times New Roman"/>
               </a:rPr>
-              <a:t>. </a:t>
-            </a:r>
-            <a:endParaRPr lang="en-US" sz="2600" dirty="0" smtClean="0">
-              <a:solidFill>
-                <a:srgbClr val="000000"/>
-              </a:solidFill>
-              <a:latin typeface="Times New Roman"/>
-            </a:endParaRPr>
+              <a:t>CO3 	Explain a computer crime and the concept of rules or 	policy violations. </a:t>
+            </a:r>
           </a:p>
           <a:p>
             <a:pPr marL="68580" indent="0">
@@ -15634,17 +15337,13 @@
                 </a:solidFill>
                 <a:latin typeface="Times New Roman"/>
               </a:rPr>
-              <a:t>CO3 	Explain a computer crime and the concept of rules or </a:t>
-            </a:r>
-            <a:r>
-              <a:rPr lang="en-US" sz="2600" dirty="0" smtClean="0">
-                <a:solidFill>
-                  <a:srgbClr val="000000"/>
-                </a:solidFill>
-                <a:latin typeface="Times New Roman"/>
-              </a:rPr>
-              <a:t>	policy </a:t>
-            </a:r>
+              <a:t>CO4 	Gather evidences and preserve the collected evidence 	with the required knowledge on various storage 	format 	choices. </a:t>
+            </a:r>
+          </a:p>
+          <a:p>
+            <a:pPr marL="68580" indent="0">
+              <a:buNone/>
+            </a:pPr>
             <a:r>
               <a:rPr lang="en-US" sz="2600" dirty="0">
                 <a:solidFill>
@@ -15652,119 +15351,7 @@
                 </a:solidFill>
                 <a:latin typeface="Times New Roman"/>
               </a:rPr>
-              <a:t>violations. </a:t>
-            </a:r>
-            <a:endParaRPr lang="en-US" sz="2600" dirty="0" smtClean="0">
-              <a:solidFill>
-                <a:srgbClr val="000000"/>
-              </a:solidFill>
-              <a:latin typeface="Times New Roman"/>
-            </a:endParaRPr>
-          </a:p>
-          <a:p>
-            <a:pPr marL="68580" indent="0">
-              <a:buNone/>
-            </a:pPr>
-            <a:r>
-              <a:rPr lang="en-US" sz="2600" dirty="0">
-                <a:solidFill>
-                  <a:srgbClr val="000000"/>
-                </a:solidFill>
-                <a:latin typeface="Times New Roman"/>
-              </a:rPr>
-              <a:t>CO4 	Gather evidences and preserve the collected evidence </a:t>
-            </a:r>
-            <a:r>
-              <a:rPr lang="en-US" sz="2600" dirty="0" smtClean="0">
-                <a:solidFill>
-                  <a:srgbClr val="000000"/>
-                </a:solidFill>
-                <a:latin typeface="Times New Roman"/>
-              </a:rPr>
-              <a:t>	with </a:t>
-            </a:r>
-            <a:r>
-              <a:rPr lang="en-US" sz="2600" dirty="0">
-                <a:solidFill>
-                  <a:srgbClr val="000000"/>
-                </a:solidFill>
-                <a:latin typeface="Times New Roman"/>
-              </a:rPr>
-              <a:t>the required knowledge on various storage </a:t>
-            </a:r>
-            <a:r>
-              <a:rPr lang="en-US" sz="2600" dirty="0" smtClean="0">
-                <a:solidFill>
-                  <a:srgbClr val="000000"/>
-                </a:solidFill>
-                <a:latin typeface="Times New Roman"/>
-              </a:rPr>
-              <a:t>	format 	choices</a:t>
-            </a:r>
-            <a:r>
-              <a:rPr lang="en-US" sz="2600" dirty="0">
-                <a:solidFill>
-                  <a:srgbClr val="000000"/>
-                </a:solidFill>
-                <a:latin typeface="Times New Roman"/>
-              </a:rPr>
-              <a:t>. </a:t>
-            </a:r>
-            <a:endParaRPr lang="en-US" sz="2600" dirty="0" smtClean="0">
-              <a:solidFill>
-                <a:srgbClr val="000000"/>
-              </a:solidFill>
-              <a:latin typeface="Times New Roman"/>
-            </a:endParaRPr>
-          </a:p>
-          <a:p>
-            <a:pPr marL="68580" indent="0">
-              <a:buNone/>
-            </a:pPr>
-            <a:r>
-              <a:rPr lang="en-US" sz="2600" dirty="0">
-                <a:solidFill>
-                  <a:srgbClr val="000000"/>
-                </a:solidFill>
-                <a:latin typeface="Times New Roman"/>
-              </a:rPr>
-              <a:t>CO5 	Prepare forensics reports both using tools and </a:t>
-            </a:r>
-            <a:r>
-              <a:rPr lang="en-US" sz="2600" dirty="0" smtClean="0">
-                <a:solidFill>
-                  <a:srgbClr val="000000"/>
-                </a:solidFill>
-                <a:latin typeface="Times New Roman"/>
-              </a:rPr>
-              <a:t>	manually  	and </a:t>
-            </a:r>
-            <a:r>
-              <a:rPr lang="en-US" sz="2600" dirty="0">
-                <a:solidFill>
-                  <a:srgbClr val="000000"/>
-                </a:solidFill>
-                <a:latin typeface="Times New Roman"/>
-              </a:rPr>
-              <a:t>explain ethics and code for expert </a:t>
-            </a:r>
-            <a:r>
-              <a:rPr lang="en-US" sz="2600" dirty="0" smtClean="0">
-                <a:solidFill>
-                  <a:srgbClr val="000000"/>
-                </a:solidFill>
-                <a:latin typeface="Times New Roman"/>
-              </a:rPr>
-              <a:t>witness</a:t>
-            </a:r>
-            <a:r>
-              <a:rPr lang="en-US" sz="2600" dirty="0">
-                <a:solidFill>
-                  <a:srgbClr val="000000"/>
-                </a:solidFill>
-                <a:latin typeface="Times New Roman"/>
-              </a:rPr>
-              <a:t>. 	</a:t>
+              <a:t>CO5 	Prepare forensics reports both using tools and 	manually  	and explain ethics and code for expert witness. 	</a:t>
             </a:r>
           </a:p>
           <a:p>
@@ -15844,13 +15431,6 @@
   <p:clrMapOvr>
     <a:masterClrMapping/>
   </p:clrMapOvr>
-  <p:timing>
-    <p:tnLst>
-      <p:par>
-        <p:cTn id="1" dur="indefinite" restart="never" nodeType="tmRoot"/>
-      </p:par>
-    </p:tnLst>
-  </p:timing>
 </p:sld>
 </file>
 
@@ -15899,14 +15479,7 @@
                 <a:latin typeface="Times New Roman" pitchFamily="18" charset="0"/>
                 <a:cs typeface="Times New Roman" pitchFamily="18" charset="0"/>
               </a:rPr>
-              <a:t>5. Ethical and Educational </a:t>
-            </a:r>
-            <a:r>
-              <a:rPr lang="en-US" dirty="0" smtClean="0">
-                <a:latin typeface="Times New Roman" pitchFamily="18" charset="0"/>
-                <a:cs typeface="Times New Roman" pitchFamily="18" charset="0"/>
-              </a:rPr>
-              <a:t>Measures</a:t>
+              <a:t>5. Ethical and Educational Measures</a:t>
             </a:r>
           </a:p>
           <a:p>
@@ -15914,18 +15487,11 @@
               <a:buNone/>
             </a:pPr>
             <a:r>
-              <a:rPr lang="en-US" dirty="0" smtClean="0">
-                <a:latin typeface="Times New Roman" pitchFamily="18" charset="0"/>
-                <a:cs typeface="Times New Roman" pitchFamily="18" charset="0"/>
-              </a:rPr>
-              <a:t>Awareness </a:t>
-            </a:r>
-            <a:r>
               <a:rPr lang="en-US" dirty="0">
                 <a:latin typeface="Times New Roman" pitchFamily="18" charset="0"/>
                 <a:cs typeface="Times New Roman" pitchFamily="18" charset="0"/>
               </a:rPr>
-              <a:t>Campaigns: Educate users about respecting intellectual </a:t>
+              <a:t>Awareness Campaigns: Educate users about respecting intellectual </a:t>
             </a:r>
             <a:r>
               <a:rPr lang="en-US" dirty="0" err="1">
@@ -15939,14 +15505,7 @@
                 <a:latin typeface="Times New Roman" pitchFamily="18" charset="0"/>
                 <a:cs typeface="Times New Roman" pitchFamily="18" charset="0"/>
               </a:rPr>
-              <a:t> Policies: Universities and corporations may adopt policies promoting legal use of digital content</a:t>
-            </a:r>
-            <a:r>
-              <a:rPr lang="en-US" dirty="0" smtClean="0">
-                <a:latin typeface="Times New Roman" pitchFamily="18" charset="0"/>
-                <a:cs typeface="Times New Roman" pitchFamily="18" charset="0"/>
-              </a:rPr>
-              <a:t>.</a:t>
+              <a:t> Policies: Universities and corporations may adopt policies promoting legal use of digital content.</a:t>
             </a:r>
           </a:p>
           <a:p>
@@ -15954,25 +15513,11 @@
               <a:buNone/>
             </a:pPr>
             <a:r>
-              <a:rPr lang="en-US" b="1" dirty="0" smtClean="0">
-                <a:latin typeface="Times New Roman" pitchFamily="18" charset="0"/>
-                <a:cs typeface="Times New Roman" pitchFamily="18" charset="0"/>
-              </a:rPr>
-              <a:t>Infringement </a:t>
-            </a:r>
-            <a:r>
               <a:rPr lang="en-US" b="1" dirty="0">
                 <a:latin typeface="Times New Roman" pitchFamily="18" charset="0"/>
                 <a:cs typeface="Times New Roman" pitchFamily="18" charset="0"/>
               </a:rPr>
-              <a:t>of copyright on </a:t>
-            </a:r>
-            <a:r>
-              <a:rPr lang="en-US" b="1" dirty="0" smtClean="0">
-                <a:latin typeface="Times New Roman" pitchFamily="18" charset="0"/>
-                <a:cs typeface="Times New Roman" pitchFamily="18" charset="0"/>
-              </a:rPr>
-              <a:t>cyberspace</a:t>
+              <a:t>Infringement of copyright on cyberspace</a:t>
             </a:r>
           </a:p>
           <a:p>
@@ -16003,13 +15548,6 @@
   <p:clrMapOvr>
     <a:masterClrMapping/>
   </p:clrMapOvr>
-  <p:timing>
-    <p:tnLst>
-      <p:par>
-        <p:cTn id="1" dur="indefinite" restart="never" nodeType="tmRoot"/>
-      </p:par>
-    </p:tnLst>
-  </p:timing>
 </p:sld>
 </file>
 
@@ -16066,18 +15604,11 @@
               <a:buNone/>
             </a:pPr>
             <a:r>
-              <a:rPr lang="en-US" dirty="0" smtClean="0">
-                <a:latin typeface="Times New Roman" pitchFamily="18" charset="0"/>
-                <a:cs typeface="Times New Roman" pitchFamily="18" charset="0"/>
-              </a:rPr>
-              <a:t>1. Illegal </a:t>
-            </a:r>
-            <a:r>
               <a:rPr lang="en-US" dirty="0">
                 <a:latin typeface="Times New Roman" pitchFamily="18" charset="0"/>
                 <a:cs typeface="Times New Roman" pitchFamily="18" charset="0"/>
               </a:rPr>
-              <a:t>Downloading:</a:t>
+              <a:t>1. Illegal Downloading:</a:t>
             </a:r>
           </a:p>
           <a:p>
@@ -16091,10 +15622,6 @@
               </a:rPr>
               <a:t>Downloading copyrighted music, movies, video games, software, or e-books without permission is a common form of infringement. </a:t>
             </a:r>
-            <a:endParaRPr lang="en-US" dirty="0" smtClean="0">
-              <a:latin typeface="Times New Roman" pitchFamily="18" charset="0"/>
-              <a:cs typeface="Times New Roman" pitchFamily="18" charset="0"/>
-            </a:endParaRPr>
           </a:p>
           <a:p>
             <a:pPr marL="68580" indent="0">
@@ -16119,10 +15646,6 @@
               </a:rPr>
               <a:t>Uploading copyrighted material to the internet without permission, such as sharing music or videos on social media or online platforms, is also infringement. </a:t>
             </a:r>
-            <a:endParaRPr lang="en-US" dirty="0" smtClean="0">
-              <a:latin typeface="Times New Roman" pitchFamily="18" charset="0"/>
-              <a:cs typeface="Times New Roman" pitchFamily="18" charset="0"/>
-            </a:endParaRPr>
           </a:p>
           <a:p>
             <a:pPr marL="68580" indent="0">
@@ -16164,13 +15687,6 @@
   <p:clrMapOvr>
     <a:masterClrMapping/>
   </p:clrMapOvr>
-  <p:timing>
-    <p:tnLst>
-      <p:par>
-        <p:cTn id="1" dur="indefinite" restart="never" nodeType="tmRoot"/>
-      </p:par>
-    </p:tnLst>
-  </p:timing>
 </p:sld>
 </file>
 
@@ -16239,18 +15755,11 @@
               <a:buNone/>
             </a:pPr>
             <a:r>
-              <a:rPr lang="en-US" dirty="0" smtClean="0">
-                <a:latin typeface="Times New Roman" pitchFamily="18" charset="0"/>
-                <a:cs typeface="Times New Roman" pitchFamily="18" charset="0"/>
-              </a:rPr>
-              <a:t>4. Plagiarism</a:t>
-            </a:r>
-            <a:r>
               <a:rPr lang="en-US" dirty="0">
                 <a:latin typeface="Times New Roman" pitchFamily="18" charset="0"/>
                 <a:cs typeface="Times New Roman" pitchFamily="18" charset="0"/>
               </a:rPr>
-              <a:t>:</a:t>
+              <a:t>4. Plagiarism:</a:t>
             </a:r>
           </a:p>
           <a:p>
@@ -16262,14 +15771,7 @@
                 <a:latin typeface="Times New Roman" pitchFamily="18" charset="0"/>
                 <a:cs typeface="Times New Roman" pitchFamily="18" charset="0"/>
               </a:rPr>
-              <a:t>Copying and pasting text, images, or other content from websites without giving proper credit is a form of infringement</a:t>
-            </a:r>
-            <a:r>
-              <a:rPr lang="en-US" dirty="0" smtClean="0">
-                <a:latin typeface="Times New Roman" pitchFamily="18" charset="0"/>
-                <a:cs typeface="Times New Roman" pitchFamily="18" charset="0"/>
-              </a:rPr>
-              <a:t>.</a:t>
+              <a:t>Copying and pasting text, images, or other content from websites without giving proper credit is a form of infringement.</a:t>
             </a:r>
           </a:p>
           <a:p>
@@ -16312,13 +15814,6 @@
   <p:clrMapOvr>
     <a:masterClrMapping/>
   </p:clrMapOvr>
-  <p:timing>
-    <p:tnLst>
-      <p:par>
-        <p:cTn id="1" dur="indefinite" restart="never" nodeType="tmRoot"/>
-      </p:par>
-    </p:tnLst>
-  </p:timing>
 </p:sld>
 </file>
 
@@ -16365,25 +15860,11 @@
               <a:buNone/>
             </a:pPr>
             <a:r>
-              <a:rPr lang="en-IN" b="1" dirty="0" smtClean="0">
-                <a:latin typeface="Times New Roman" pitchFamily="18" charset="0"/>
-                <a:cs typeface="Times New Roman" pitchFamily="18" charset="0"/>
-              </a:rPr>
-              <a:t>Linking</a:t>
-            </a:r>
-            <a:r>
               <a:rPr lang="en-IN" b="1" dirty="0">
                 <a:latin typeface="Times New Roman" pitchFamily="18" charset="0"/>
                 <a:cs typeface="Times New Roman" pitchFamily="18" charset="0"/>
               </a:rPr>
-              <a:t>, hyperlinking and </a:t>
-            </a:r>
-            <a:r>
-              <a:rPr lang="en-IN" b="1" dirty="0" smtClean="0">
-                <a:latin typeface="Times New Roman" pitchFamily="18" charset="0"/>
-                <a:cs typeface="Times New Roman" pitchFamily="18" charset="0"/>
-              </a:rPr>
-              <a:t>framing</a:t>
+              <a:t>Linking, hyperlinking and framing</a:t>
             </a:r>
           </a:p>
           <a:p>
@@ -16397,10 +15878,6 @@
               </a:rPr>
               <a:t>Linking and framing are essential web technologies, and hyperlinking is a type of linking. Linking connects web pages or websites, while framing displays content from one website within another. Hyperlinking, often in the form of a link or button, directs users to another page, while framing divides a web browser into multiple areas for content from different sources. </a:t>
             </a:r>
-            <a:endParaRPr lang="en-US" dirty="0" smtClean="0">
-              <a:latin typeface="Times New Roman" pitchFamily="18" charset="0"/>
-              <a:cs typeface="Times New Roman" pitchFamily="18" charset="0"/>
-            </a:endParaRPr>
           </a:p>
           <a:p>
             <a:pPr marL="68580" indent="0">
@@ -16454,13 +15931,6 @@
   <p:clrMapOvr>
     <a:masterClrMapping/>
   </p:clrMapOvr>
-  <p:timing>
-    <p:tnLst>
-      <p:par>
-        <p:cTn id="1" dur="indefinite" restart="never" nodeType="tmRoot"/>
-      </p:par>
-    </p:tnLst>
-  </p:timing>
 </p:sld>
 </file>
 
@@ -16511,14 +15981,7 @@
                 <a:latin typeface="Times New Roman" pitchFamily="18" charset="0"/>
                 <a:cs typeface="Times New Roman" pitchFamily="18" charset="0"/>
               </a:rPr>
-              <a:t>Surface linking: Links to a website’s homepage</a:t>
-            </a:r>
-            <a:r>
-              <a:rPr lang="en-US" dirty="0" smtClean="0">
-                <a:latin typeface="Times New Roman" pitchFamily="18" charset="0"/>
-                <a:cs typeface="Times New Roman" pitchFamily="18" charset="0"/>
-              </a:rPr>
-              <a:t>.</a:t>
+              <a:t>Surface linking: Links to a website’s homepage.</a:t>
             </a:r>
           </a:p>
           <a:p>
@@ -16526,41 +15989,23 @@
               <a:buNone/>
             </a:pPr>
             <a:r>
-              <a:rPr lang="en-US" dirty="0" smtClean="0">
-                <a:latin typeface="Times New Roman" pitchFamily="18" charset="0"/>
-                <a:cs typeface="Times New Roman" pitchFamily="18" charset="0"/>
-              </a:rPr>
-              <a:t>Deep </a:t>
-            </a:r>
-            <a:r>
               <a:rPr lang="en-US" dirty="0">
                 <a:latin typeface="Times New Roman" pitchFamily="18" charset="0"/>
                 <a:cs typeface="Times New Roman" pitchFamily="18" charset="0"/>
               </a:rPr>
-              <a:t>linking: Links directly to a specific page within a website.</a:t>
-            </a:r>
-            <a:endParaRPr lang="en-US" dirty="0" smtClean="0">
-              <a:latin typeface="Times New Roman" pitchFamily="18" charset="0"/>
-              <a:cs typeface="Times New Roman" pitchFamily="18" charset="0"/>
-            </a:endParaRPr>
+              <a:t>Deep linking: Links directly to a specific page within a website.</a:t>
+            </a:r>
           </a:p>
           <a:p>
             <a:pPr marL="68580" indent="0">
               <a:buNone/>
             </a:pPr>
             <a:r>
-              <a:rPr lang="en-US" dirty="0" smtClean="0">
-                <a:latin typeface="Times New Roman" pitchFamily="18" charset="0"/>
-                <a:cs typeface="Times New Roman" pitchFamily="18" charset="0"/>
-              </a:rPr>
-              <a:t>Framing</a:t>
-            </a:r>
-            <a:r>
               <a:rPr lang="en-US" dirty="0">
                 <a:latin typeface="Times New Roman" pitchFamily="18" charset="0"/>
                 <a:cs typeface="Times New Roman" pitchFamily="18" charset="0"/>
               </a:rPr>
-              <a:t>:</a:t>
+              <a:t>Framing:</a:t>
             </a:r>
           </a:p>
           <a:p>
@@ -16598,10 +16043,6 @@
               </a:rPr>
               <a:t>Frames can be used to create different sections or areas on a webpage, displaying content from various websites. </a:t>
             </a:r>
-            <a:endParaRPr lang="en-US" dirty="0" smtClean="0">
-              <a:latin typeface="Times New Roman" pitchFamily="18" charset="0"/>
-              <a:cs typeface="Times New Roman" pitchFamily="18" charset="0"/>
-            </a:endParaRPr>
           </a:p>
           <a:p>
             <a:pPr marL="68580" indent="0">
@@ -16631,13 +16072,6 @@
   <p:clrMapOvr>
     <a:masterClrMapping/>
   </p:clrMapOvr>
-  <p:timing>
-    <p:tnLst>
-      <p:par>
-        <p:cTn id="1" dur="indefinite" restart="never" nodeType="tmRoot"/>
-      </p:par>
-    </p:tnLst>
-  </p:timing>
 </p:sld>
 </file>
 
@@ -16686,14 +16120,7 @@
                 <a:latin typeface="Times New Roman" pitchFamily="18" charset="0"/>
                 <a:cs typeface="Times New Roman" pitchFamily="18" charset="0"/>
               </a:rPr>
-              <a:t>ISP in </a:t>
-            </a:r>
-            <a:r>
-              <a:rPr lang="en-IN" b="1" dirty="0" smtClean="0">
-                <a:latin typeface="Times New Roman" pitchFamily="18" charset="0"/>
-                <a:cs typeface="Times New Roman" pitchFamily="18" charset="0"/>
-              </a:rPr>
-              <a:t>cyberspace</a:t>
+              <a:t>ISP in cyberspace</a:t>
             </a:r>
           </a:p>
           <a:p>
@@ -16707,10 +16134,6 @@
               </a:rPr>
               <a:t>An ISP, or Internet Service Provider, is a company that provides internet access to individuals and businesses. They connect users to the internet, enabling them to browse, email, and use other online services. </a:t>
             </a:r>
-            <a:endParaRPr lang="en-US" dirty="0" smtClean="0">
-              <a:latin typeface="Times New Roman" pitchFamily="18" charset="0"/>
-              <a:cs typeface="Times New Roman" pitchFamily="18" charset="0"/>
-            </a:endParaRPr>
           </a:p>
           <a:p>
             <a:pPr marL="68580" indent="0">
@@ -16723,10 +16146,6 @@
               </a:rPr>
               <a:t>Besides internet access, ISPs may offer other services like email, web hosting, and domain registration. </a:t>
             </a:r>
-            <a:endParaRPr lang="en-US" dirty="0" smtClean="0">
-              <a:latin typeface="Times New Roman" pitchFamily="18" charset="0"/>
-              <a:cs typeface="Times New Roman" pitchFamily="18" charset="0"/>
-            </a:endParaRPr>
           </a:p>
           <a:p>
             <a:pPr marL="68580" indent="0">
@@ -16739,10 +16158,6 @@
               </a:rPr>
               <a:t>Users pay ISPs for the internet access and other services they provide. </a:t>
             </a:r>
-            <a:endParaRPr lang="en-US" dirty="0" smtClean="0">
-              <a:latin typeface="Times New Roman" pitchFamily="18" charset="0"/>
-              <a:cs typeface="Times New Roman" pitchFamily="18" charset="0"/>
-            </a:endParaRPr>
           </a:p>
           <a:p>
             <a:pPr marL="68580" indent="0">
@@ -16755,10 +16170,6 @@
               </a:rPr>
               <a:t>ISPs provide the infrastructure (wires, cables, satellite connections, etc.) and the means to connect to the internet. </a:t>
             </a:r>
-            <a:endParaRPr lang="en-US" dirty="0" smtClean="0">
-              <a:latin typeface="Times New Roman" pitchFamily="18" charset="0"/>
-              <a:cs typeface="Times New Roman" pitchFamily="18" charset="0"/>
-            </a:endParaRPr>
           </a:p>
           <a:p>
             <a:pPr marL="68580" indent="0">
@@ -16788,13 +16199,6 @@
   <p:clrMapOvr>
     <a:masterClrMapping/>
   </p:clrMapOvr>
-  <p:timing>
-    <p:tnLst>
-      <p:par>
-        <p:cTn id="1" dur="indefinite" restart="never" nodeType="tmRoot"/>
-      </p:par>
-    </p:tnLst>
-  </p:timing>
 </p:sld>
 </file>
 
@@ -16916,10 +16320,6 @@
               </a:rPr>
               <a:t>Other local and regional ISPs. </a:t>
             </a:r>
-            <a:endParaRPr lang="en-US" dirty="0" smtClean="0">
-              <a:latin typeface="Times New Roman" pitchFamily="18" charset="0"/>
-              <a:cs typeface="Times New Roman" pitchFamily="18" charset="0"/>
-            </a:endParaRPr>
           </a:p>
           <a:p>
             <a:pPr marL="68580" indent="0">
@@ -16930,14 +16330,7 @@
                 <a:latin typeface="Times New Roman" pitchFamily="18" charset="0"/>
                 <a:cs typeface="Times New Roman" pitchFamily="18" charset="0"/>
               </a:rPr>
-              <a:t>cyberspace and protection of patents in </a:t>
-            </a:r>
-            <a:r>
-              <a:rPr lang="en-US" b="1" dirty="0" smtClean="0">
-                <a:latin typeface="Times New Roman" pitchFamily="18" charset="0"/>
-                <a:cs typeface="Times New Roman" pitchFamily="18" charset="0"/>
-              </a:rPr>
-              <a:t>India</a:t>
+              <a:t>cyberspace and protection of patents in India</a:t>
             </a:r>
           </a:p>
           <a:p>
@@ -16996,13 +16389,6 @@
   <p:clrMapOvr>
     <a:masterClrMapping/>
   </p:clrMapOvr>
-  <p:timing>
-    <p:tnLst>
-      <p:par>
-        <p:cTn id="1" dur="indefinite" restart="never" nodeType="tmRoot"/>
-      </p:par>
-    </p:tnLst>
-  </p:timing>
 </p:sld>
 </file>
 
@@ -17065,10 +16451,6 @@
               </a:rPr>
               <a:t>While software itself is generally not patentable, inventions involving software that provide a tangible "technical effect" can be patented. </a:t>
             </a:r>
-            <a:endParaRPr lang="en-US" dirty="0" smtClean="0">
-              <a:latin typeface="Times New Roman" pitchFamily="18" charset="0"/>
-              <a:cs typeface="Times New Roman" pitchFamily="18" charset="0"/>
-            </a:endParaRPr>
           </a:p>
           <a:p>
             <a:pPr marL="68580" indent="0">
@@ -17114,10 +16496,6 @@
               </a:rPr>
               <a:t> inventions, including those related to online security and data protection, can qualify for patent protection under this "technical effect" criterion. </a:t>
             </a:r>
-            <a:endParaRPr lang="en-US" dirty="0" smtClean="0">
-              <a:latin typeface="Times New Roman" pitchFamily="18" charset="0"/>
-              <a:cs typeface="Times New Roman" pitchFamily="18" charset="0"/>
-            </a:endParaRPr>
           </a:p>
           <a:p>
             <a:pPr marL="68580" indent="0">
@@ -17159,13 +16537,6 @@
   <p:clrMapOvr>
     <a:masterClrMapping/>
   </p:clrMapOvr>
-  <p:timing>
-    <p:tnLst>
-      <p:par>
-        <p:cTn id="1" dur="indefinite" restart="never" nodeType="tmRoot"/>
-      </p:par>
-    </p:tnLst>
-  </p:timing>
 </p:sld>
 </file>
 
@@ -17228,10 +16599,6 @@
               </a:rPr>
               <a:t>The Information Technology Act, 2000, complements patent and other IP laws by addressing issues like data theft and hacking, which are relevant in the context of cyberspace. </a:t>
             </a:r>
-            <a:endParaRPr lang="en-US" dirty="0" smtClean="0">
-              <a:latin typeface="Times New Roman" pitchFamily="18" charset="0"/>
-              <a:cs typeface="Times New Roman" pitchFamily="18" charset="0"/>
-            </a:endParaRPr>
           </a:p>
           <a:p>
             <a:pPr marL="68580" indent="0">
@@ -17298,10 +16665,6 @@
               </a:rPr>
               <a:t>) are areas where further legal frameworks may be needed to address intellectual property protection in the evolving digital landscape. </a:t>
             </a:r>
-            <a:endParaRPr lang="en-US" dirty="0" smtClean="0">
-              <a:latin typeface="Times New Roman" pitchFamily="18" charset="0"/>
-              <a:cs typeface="Times New Roman" pitchFamily="18" charset="0"/>
-            </a:endParaRPr>
           </a:p>
           <a:p>
             <a:pPr marL="68580" indent="0">
@@ -17331,13 +16694,6 @@
   <p:clrMapOvr>
     <a:masterClrMapping/>
   </p:clrMapOvr>
-  <p:timing>
-    <p:tnLst>
-      <p:par>
-        <p:cTn id="1" dur="indefinite" restart="never" nodeType="tmRoot"/>
-      </p:par>
-    </p:tnLst>
-  </p:timing>
 </p:sld>
 </file>
 
@@ -17431,14 +16787,7 @@
                 <a:latin typeface="Times New Roman" pitchFamily="18" charset="0"/>
                 <a:cs typeface="Times New Roman" pitchFamily="18" charset="0"/>
               </a:rPr>
-              <a:t> their innovations, helping spread cyber security technologies across industries</a:t>
-            </a:r>
-            <a:r>
-              <a:rPr lang="en-US" dirty="0" smtClean="0">
-                <a:latin typeface="Times New Roman" pitchFamily="18" charset="0"/>
-                <a:cs typeface="Times New Roman" pitchFamily="18" charset="0"/>
-              </a:rPr>
-              <a:t>.</a:t>
+              <a:t> their innovations, helping spread cyber security technologies across industries.</a:t>
             </a:r>
           </a:p>
           <a:p>
@@ -17481,13 +16830,6 @@
   <p:clrMapOvr>
     <a:masterClrMapping/>
   </p:clrMapOvr>
-  <p:timing>
-    <p:tnLst>
-      <p:par>
-        <p:cTn id="1" dur="indefinite" restart="never" nodeType="tmRoot"/>
-      </p:par>
-    </p:tnLst>
-  </p:timing>
 </p:sld>
 </file>
 
@@ -17538,14 +16880,7 @@
                 <a:latin typeface="Times New Roman" pitchFamily="18" charset="0"/>
                 <a:cs typeface="Times New Roman" pitchFamily="18" charset="0"/>
               </a:rPr>
-              <a:t>Introduction to Cyber </a:t>
-            </a:r>
-            <a:r>
-              <a:rPr lang="en-IN" b="1" dirty="0" smtClean="0">
-                <a:latin typeface="Times New Roman" pitchFamily="18" charset="0"/>
-                <a:cs typeface="Times New Roman" pitchFamily="18" charset="0"/>
-              </a:rPr>
-              <a:t>Law</a:t>
+              <a:t>Introduction to Cyber Law</a:t>
             </a:r>
           </a:p>
           <a:p>
@@ -17595,13 +16930,6 @@
   <p:clrMapOvr>
     <a:masterClrMapping/>
   </p:clrMapOvr>
-  <p:timing>
-    <p:tnLst>
-      <p:par>
-        <p:cTn id="1" dur="indefinite" restart="never" nodeType="tmRoot"/>
-      </p:par>
-    </p:tnLst>
-  </p:timing>
 </p:sld>
 </file>
 
@@ -17664,14 +16992,7 @@
                 <a:latin typeface="Times New Roman" pitchFamily="18" charset="0"/>
                 <a:cs typeface="Times New Roman" pitchFamily="18" charset="0"/>
               </a:rPr>
-              <a:t>Section 10: Patent applications must provide enough technical detail for replication, striking a balance in cyber security between protection and confidentiality</a:t>
-            </a:r>
-            <a:r>
-              <a:rPr lang="en-US" dirty="0" smtClean="0">
-                <a:latin typeface="Times New Roman" pitchFamily="18" charset="0"/>
-                <a:cs typeface="Times New Roman" pitchFamily="18" charset="0"/>
-              </a:rPr>
-              <a:t>.</a:t>
+              <a:t>Section 10: Patent applications must provide enough technical detail for replication, striking a balance in cyber security between protection and confidentiality.</a:t>
             </a:r>
           </a:p>
           <a:p>
@@ -17679,25 +17000,11 @@
               <a:buNone/>
             </a:pPr>
             <a:r>
-              <a:rPr lang="en-US" b="1" dirty="0" smtClean="0">
-                <a:latin typeface="Times New Roman" pitchFamily="18" charset="0"/>
-                <a:cs typeface="Times New Roman" pitchFamily="18" charset="0"/>
-              </a:rPr>
-              <a:t>Steps </a:t>
-            </a:r>
-            <a:r>
               <a:rPr lang="en-US" b="1" dirty="0">
                 <a:latin typeface="Times New Roman" pitchFamily="18" charset="0"/>
                 <a:cs typeface="Times New Roman" pitchFamily="18" charset="0"/>
               </a:rPr>
-              <a:t>to Secure a Patent in Cyber </a:t>
-            </a:r>
-            <a:r>
-              <a:rPr lang="en-US" b="1" dirty="0" smtClean="0">
-                <a:latin typeface="Times New Roman" pitchFamily="18" charset="0"/>
-                <a:cs typeface="Times New Roman" pitchFamily="18" charset="0"/>
-              </a:rPr>
-              <a:t>Security</a:t>
+              <a:t>Steps to Secure a Patent in Cyber Security</a:t>
             </a:r>
           </a:p>
           <a:p>
@@ -17705,25 +17012,11 @@
               <a:buAutoNum type="arabicPeriod"/>
             </a:pPr>
             <a:r>
-              <a:rPr lang="en-US" dirty="0" smtClean="0">
-                <a:latin typeface="Times New Roman" pitchFamily="18" charset="0"/>
-                <a:cs typeface="Times New Roman" pitchFamily="18" charset="0"/>
-              </a:rPr>
-              <a:t>Conduct </a:t>
-            </a:r>
-            <a:r>
               <a:rPr lang="en-US" dirty="0">
                 <a:latin typeface="Times New Roman" pitchFamily="18" charset="0"/>
                 <a:cs typeface="Times New Roman" pitchFamily="18" charset="0"/>
               </a:rPr>
-              <a:t>a Comprehensive Patent Search: Ensure your invention is unique by conducting a prior art search</a:t>
-            </a:r>
-            <a:r>
-              <a:rPr lang="en-US" dirty="0" smtClean="0">
-                <a:latin typeface="Times New Roman" pitchFamily="18" charset="0"/>
-                <a:cs typeface="Times New Roman" pitchFamily="18" charset="0"/>
-              </a:rPr>
-              <a:t>.</a:t>
+              <a:t>Conduct a Comprehensive Patent Search: Ensure your invention is unique by conducting a prior art search.</a:t>
             </a:r>
           </a:p>
           <a:p>
@@ -17766,13 +17059,6 @@
   <p:clrMapOvr>
     <a:masterClrMapping/>
   </p:clrMapOvr>
-  <p:timing>
-    <p:tnLst>
-      <p:par>
-        <p:cTn id="1" dur="indefinite" restart="never" nodeType="tmRoot"/>
-      </p:par>
-    </p:tnLst>
-  </p:timing>
 </p:sld>
 </file>
 
@@ -17817,18 +17103,11 @@
               <a:buNone/>
             </a:pPr>
             <a:r>
-              <a:rPr lang="en-US" dirty="0" smtClean="0">
-                <a:latin typeface="Times New Roman" pitchFamily="18" charset="0"/>
-                <a:cs typeface="Times New Roman" pitchFamily="18" charset="0"/>
-              </a:rPr>
-              <a:t>4. Undergo </a:t>
-            </a:r>
-            <a:r>
               <a:rPr lang="en-US" dirty="0">
                 <a:latin typeface="Times New Roman" pitchFamily="18" charset="0"/>
                 <a:cs typeface="Times New Roman" pitchFamily="18" charset="0"/>
               </a:rPr>
-              <a:t>Examination: The patent office will examine the application, during which inventors must respond to any queries to satisfy all criteria.</a:t>
+              <a:t>4. Undergo Examination: The patent office will examine the application, during which inventors must respond to any queries to satisfy all criteria.</a:t>
             </a:r>
           </a:p>
           <a:p>
@@ -17836,18 +17115,11 @@
               <a:buNone/>
             </a:pPr>
             <a:r>
-              <a:rPr lang="en-US" dirty="0" smtClean="0">
-                <a:latin typeface="Times New Roman" pitchFamily="18" charset="0"/>
-                <a:cs typeface="Times New Roman" pitchFamily="18" charset="0"/>
-              </a:rPr>
-              <a:t>5. Receive </a:t>
-            </a:r>
-            <a:r>
               <a:rPr lang="en-US" dirty="0">
                 <a:latin typeface="Times New Roman" pitchFamily="18" charset="0"/>
                 <a:cs typeface="Times New Roman" pitchFamily="18" charset="0"/>
               </a:rPr>
-              <a:t>the Patent Grant: Once approved, the inventor receives a patent, usually valid for 20 years, securing exclusive rights in India.</a:t>
+              <a:t>5. Receive the Patent Grant: Once approved, the inventor receives a patent, usually valid for 20 years, securing exclusive rights in India.</a:t>
             </a:r>
             <a:endParaRPr lang="en-IN" dirty="0">
               <a:latin typeface="Times New Roman" pitchFamily="18" charset="0"/>
@@ -17866,13 +17138,6 @@
   <p:clrMapOvr>
     <a:masterClrMapping/>
   </p:clrMapOvr>
-  <p:timing>
-    <p:tnLst>
-      <p:par>
-        <p:cTn id="1" dur="indefinite" restart="never" nodeType="tmRoot"/>
-      </p:par>
-    </p:tnLst>
-  </p:timing>
 </p:sld>
 </file>
 
@@ -17923,14 +17188,7 @@
                 <a:latin typeface="Times New Roman" pitchFamily="18" charset="0"/>
                 <a:cs typeface="Times New Roman" pitchFamily="18" charset="0"/>
               </a:rPr>
-              <a:t>With the rapid growth of digital technology, online transactions, and social media, cyber law has become crucial to ensure security, privacy, and ethical use of the internet</a:t>
-            </a:r>
-            <a:r>
-              <a:rPr lang="en-US" sz="2800" dirty="0" smtClean="0">
-                <a:latin typeface="Times New Roman" pitchFamily="18" charset="0"/>
-                <a:cs typeface="Times New Roman" pitchFamily="18" charset="0"/>
-              </a:rPr>
-              <a:t>.</a:t>
+              <a:t>With the rapid growth of digital technology, online transactions, and social media, cyber law has become crucial to ensure security, privacy, and ethical use of the internet.</a:t>
             </a:r>
           </a:p>
           <a:p>
@@ -17942,28 +17200,7 @@
                 <a:latin typeface="Times New Roman" pitchFamily="18" charset="0"/>
                 <a:cs typeface="Times New Roman" pitchFamily="18" charset="0"/>
               </a:rPr>
-              <a:t>Needs or </a:t>
-            </a:r>
-            <a:r>
-              <a:rPr lang="en-US" sz="2800" b="1" dirty="0" smtClean="0">
-                <a:latin typeface="Times New Roman" pitchFamily="18" charset="0"/>
-                <a:cs typeface="Times New Roman" pitchFamily="18" charset="0"/>
-              </a:rPr>
-              <a:t>Importance </a:t>
-            </a:r>
-            <a:r>
-              <a:rPr lang="en-US" sz="2800" b="1" dirty="0">
-                <a:latin typeface="Times New Roman" pitchFamily="18" charset="0"/>
-                <a:cs typeface="Times New Roman" pitchFamily="18" charset="0"/>
-              </a:rPr>
-              <a:t>of Cyber </a:t>
-            </a:r>
-            <a:r>
-              <a:rPr lang="en-US" sz="2800" b="1" dirty="0" smtClean="0">
-                <a:latin typeface="Times New Roman" pitchFamily="18" charset="0"/>
-                <a:cs typeface="Times New Roman" pitchFamily="18" charset="0"/>
-              </a:rPr>
-              <a:t>Laws</a:t>
+              <a:t>Needs or Importance of Cyber Laws</a:t>
             </a:r>
           </a:p>
           <a:p>
@@ -18037,13 +17274,6 @@
   <p:clrMapOvr>
     <a:masterClrMapping/>
   </p:clrMapOvr>
-  <p:timing>
-    <p:tnLst>
-      <p:par>
-        <p:cTn id="1" dur="indefinite" restart="never" nodeType="tmRoot"/>
-      </p:par>
-    </p:tnLst>
-  </p:timing>
 </p:sld>
 </file>
 
@@ -18126,14 +17356,7 @@
                 <a:latin typeface="Times New Roman" pitchFamily="18" charset="0"/>
                 <a:cs typeface="Times New Roman" pitchFamily="18" charset="0"/>
               </a:rPr>
-              <a:t>Cyber laws provide legal remedies and penalties to prevent and punish cybercriminals</a:t>
-            </a:r>
-            <a:r>
-              <a:rPr lang="en-US" sz="2800" dirty="0" smtClean="0">
-                <a:latin typeface="Times New Roman" pitchFamily="18" charset="0"/>
-                <a:cs typeface="Times New Roman" pitchFamily="18" charset="0"/>
-              </a:rPr>
-              <a:t>.</a:t>
+              <a:t>Cyber laws provide legal remedies and penalties to prevent and punish cybercriminals.</a:t>
             </a:r>
           </a:p>
           <a:p>
@@ -18184,13 +17407,6 @@
   <p:clrMapOvr>
     <a:masterClrMapping/>
   </p:clrMapOvr>
-  <p:timing>
-    <p:tnLst>
-      <p:par>
-        <p:cTn id="1" dur="indefinite" restart="never" nodeType="tmRoot"/>
-      </p:par>
-    </p:tnLst>
-  </p:timing>
 </p:sld>
 </file>
 
@@ -18317,13 +17533,6 @@
   <p:clrMapOvr>
     <a:masterClrMapping/>
   </p:clrMapOvr>
-  <p:timing>
-    <p:tnLst>
-      <p:par>
-        <p:cTn id="1" dur="indefinite" restart="never" nodeType="tmRoot"/>
-      </p:par>
-    </p:tnLst>
-  </p:timing>
 </p:sld>
 </file>
 
@@ -18381,11 +17590,7 @@
           <a:p>
             <a:r>
               <a:rPr lang="en-US" sz="2800" dirty="0"/>
-              <a:t>Companies and organizations collect user data, making it essential to regulate data handling and prevent misuse</a:t>
-            </a:r>
-            <a:r>
-              <a:rPr lang="en-US" sz="2800" dirty="0" smtClean="0"/>
-              <a:t>.</a:t>
+              <a:t>Companies and organizations collect user data, making it essential to regulate data handling and prevent misuse.</a:t>
             </a:r>
           </a:p>
           <a:p>
@@ -18431,13 +17636,6 @@
   <p:clrMapOvr>
     <a:masterClrMapping/>
   </p:clrMapOvr>
-  <p:timing>
-    <p:tnLst>
-      <p:par>
-        <p:cTn id="1" dur="indefinite" restart="never" nodeType="tmRoot"/>
-      </p:par>
-    </p:tnLst>
-  </p:timing>
 </p:sld>
 </file>
 
@@ -18605,13 +17803,6 @@
   <p:clrMapOvr>
     <a:masterClrMapping/>
   </p:clrMapOvr>
-  <p:timing>
-    <p:tnLst>
-      <p:par>
-        <p:cTn id="1" dur="indefinite" restart="never" nodeType="tmRoot"/>
-      </p:par>
-    </p:tnLst>
-  </p:timing>
 </p:sld>
 </file>
 
@@ -18745,13 +17936,6 @@
   <p:clrMapOvr>
     <a:masterClrMapping/>
   </p:clrMapOvr>
-  <p:timing>
-    <p:tnLst>
-      <p:par>
-        <p:cTn id="1" dur="indefinite" restart="never" nodeType="tmRoot"/>
-      </p:par>
-    </p:tnLst>
-  </p:timing>
 </p:sld>
 </file>
 
